--- a/docs/pptx/carbo/ritu-carbo-adjcif-sideeffect.pptx
+++ b/docs/pptx/carbo/ritu-carbo-adjcif-sideeffect.pptx
@@ -2271,7 +2271,7 @@
           </p:nvSpPr>
           <p:spPr>
             <a:xfrm>
-              <a:off x="972874" y="5218345"/>
+              <a:off x="972874" y="5227303"/>
               <a:ext cx="7644336" cy="0"/>
             </a:xfrm>
             <a:custGeom>
@@ -2314,7 +2314,7 @@
           </p:nvSpPr>
           <p:spPr>
             <a:xfrm>
-              <a:off x="972874" y="4494192"/>
+              <a:off x="972874" y="4521065"/>
               <a:ext cx="7644336" cy="0"/>
             </a:xfrm>
             <a:custGeom>
@@ -2357,7 +2357,7 @@
           </p:nvSpPr>
           <p:spPr>
             <a:xfrm>
-              <a:off x="972874" y="3770039"/>
+              <a:off x="972874" y="3814827"/>
               <a:ext cx="7644336" cy="0"/>
             </a:xfrm>
             <a:custGeom>
@@ -2400,7 +2400,7 @@
           </p:nvSpPr>
           <p:spPr>
             <a:xfrm>
-              <a:off x="972874" y="3045886"/>
+              <a:off x="972874" y="3108589"/>
               <a:ext cx="7644336" cy="0"/>
             </a:xfrm>
             <a:custGeom>
@@ -2658,7 +2658,7 @@
           </p:nvSpPr>
           <p:spPr>
             <a:xfrm>
-              <a:off x="972874" y="4856269"/>
+              <a:off x="972874" y="4874184"/>
               <a:ext cx="7644336" cy="0"/>
             </a:xfrm>
             <a:custGeom>
@@ -2701,7 +2701,7 @@
           </p:nvSpPr>
           <p:spPr>
             <a:xfrm>
-              <a:off x="972874" y="4132116"/>
+              <a:off x="972874" y="4167946"/>
               <a:ext cx="7644336" cy="0"/>
             </a:xfrm>
             <a:custGeom>
@@ -2744,7 +2744,7 @@
           </p:nvSpPr>
           <p:spPr>
             <a:xfrm>
-              <a:off x="972874" y="3407962"/>
+              <a:off x="972874" y="3461708"/>
               <a:ext cx="7644336" cy="0"/>
             </a:xfrm>
             <a:custGeom>
@@ -2787,7 +2787,7 @@
           </p:nvSpPr>
           <p:spPr>
             <a:xfrm>
-              <a:off x="972874" y="2683809"/>
+              <a:off x="972874" y="2755471"/>
               <a:ext cx="7644336" cy="0"/>
             </a:xfrm>
             <a:custGeom>
@@ -2959,120 +2959,120 @@
           </p:nvSpPr>
           <p:spPr>
             <a:xfrm>
-              <a:off x="1320344" y="4421100"/>
-              <a:ext cx="6949396" cy="1104626"/>
+              <a:off x="1320344" y="4450310"/>
+              <a:ext cx="6949396" cy="1077084"/>
             </a:xfrm>
             <a:custGeom>
               <a:avLst/>
               <a:pathLst>
-                <a:path w="6949396" h="1104626">
+                <a:path w="6949396" h="1077084">
                   <a:moveTo>
-                    <a:pt x="0" y="1104626"/>
+                    <a:pt x="0" y="1077084"/>
                   </a:moveTo>
                   <a:lnTo>
-                    <a:pt x="89094" y="1104626"/>
-                  </a:lnTo>
-                  <a:lnTo>
-                    <a:pt x="89094" y="1050400"/>
-                  </a:lnTo>
-                  <a:lnTo>
-                    <a:pt x="178189" y="1050400"/>
-                  </a:lnTo>
-                  <a:lnTo>
-                    <a:pt x="178189" y="996186"/>
-                  </a:lnTo>
-                  <a:lnTo>
-                    <a:pt x="534568" y="996186"/>
-                  </a:lnTo>
-                  <a:lnTo>
-                    <a:pt x="534568" y="889843"/>
-                  </a:lnTo>
-                  <a:lnTo>
-                    <a:pt x="1514612" y="889843"/>
-                  </a:lnTo>
-                  <a:lnTo>
-                    <a:pt x="1514612" y="837323"/>
-                  </a:lnTo>
-                  <a:lnTo>
-                    <a:pt x="1781896" y="837323"/>
-                  </a:lnTo>
-                  <a:lnTo>
-                    <a:pt x="1781896" y="785415"/>
-                  </a:lnTo>
-                  <a:lnTo>
-                    <a:pt x="1960086" y="785415"/>
-                  </a:lnTo>
-                  <a:lnTo>
-                    <a:pt x="1960086" y="730838"/>
-                  </a:lnTo>
-                  <a:lnTo>
-                    <a:pt x="2227370" y="730838"/>
-                  </a:lnTo>
-                  <a:lnTo>
-                    <a:pt x="2227370" y="676932"/>
-                  </a:lnTo>
-                  <a:lnTo>
-                    <a:pt x="2940129" y="676932"/>
-                  </a:lnTo>
-                  <a:lnTo>
-                    <a:pt x="2940129" y="618427"/>
-                  </a:lnTo>
-                  <a:lnTo>
-                    <a:pt x="3029224" y="618427"/>
-                  </a:lnTo>
-                  <a:lnTo>
-                    <a:pt x="3029224" y="557961"/>
-                  </a:lnTo>
-                  <a:lnTo>
-                    <a:pt x="3118319" y="557961"/>
-                  </a:lnTo>
-                  <a:lnTo>
-                    <a:pt x="3118319" y="497658"/>
-                  </a:lnTo>
-                  <a:lnTo>
-                    <a:pt x="3741982" y="497658"/>
-                  </a:lnTo>
-                  <a:lnTo>
-                    <a:pt x="3741982" y="436776"/>
-                  </a:lnTo>
-                  <a:lnTo>
-                    <a:pt x="3920172" y="436776"/>
-                  </a:lnTo>
-                  <a:lnTo>
-                    <a:pt x="3920172" y="373296"/>
-                  </a:lnTo>
-                  <a:lnTo>
-                    <a:pt x="4187457" y="373296"/>
-                  </a:lnTo>
-                  <a:lnTo>
-                    <a:pt x="4187457" y="310686"/>
-                  </a:lnTo>
-                  <a:lnTo>
-                    <a:pt x="5345689" y="310686"/>
-                  </a:lnTo>
-                  <a:lnTo>
-                    <a:pt x="5345689" y="248054"/>
-                  </a:lnTo>
-                  <a:lnTo>
-                    <a:pt x="5612974" y="248054"/>
-                  </a:lnTo>
-                  <a:lnTo>
-                    <a:pt x="5612974" y="186333"/>
-                  </a:lnTo>
-                  <a:lnTo>
-                    <a:pt x="5702069" y="186333"/>
-                  </a:lnTo>
-                  <a:lnTo>
-                    <a:pt x="5702069" y="125273"/>
-                  </a:lnTo>
-                  <a:lnTo>
-                    <a:pt x="5880258" y="125273"/>
-                  </a:lnTo>
-                  <a:lnTo>
-                    <a:pt x="5880258" y="62344"/>
-                  </a:lnTo>
-                  <a:lnTo>
-                    <a:pt x="6949396" y="62344"/>
+                    <a:pt x="89094" y="1077084"/>
+                  </a:lnTo>
+                  <a:lnTo>
+                    <a:pt x="89094" y="1024529"/>
+                  </a:lnTo>
+                  <a:lnTo>
+                    <a:pt x="178189" y="1024529"/>
+                  </a:lnTo>
+                  <a:lnTo>
+                    <a:pt x="178189" y="971941"/>
+                  </a:lnTo>
+                  <a:lnTo>
+                    <a:pt x="534568" y="971941"/>
+                  </a:lnTo>
+                  <a:lnTo>
+                    <a:pt x="534568" y="868832"/>
+                  </a:lnTo>
+                  <a:lnTo>
+                    <a:pt x="1514612" y="868832"/>
+                  </a:lnTo>
+                  <a:lnTo>
+                    <a:pt x="1514612" y="817941"/>
+                  </a:lnTo>
+                  <a:lnTo>
+                    <a:pt x="1781896" y="817941"/>
+                  </a:lnTo>
+                  <a:lnTo>
+                    <a:pt x="1781896" y="767666"/>
+                  </a:lnTo>
+                  <a:lnTo>
+                    <a:pt x="1960086" y="767666"/>
+                  </a:lnTo>
+                  <a:lnTo>
+                    <a:pt x="1960086" y="714539"/>
+                  </a:lnTo>
+                  <a:lnTo>
+                    <a:pt x="2227370" y="714539"/>
+                  </a:lnTo>
+                  <a:lnTo>
+                    <a:pt x="2227370" y="662094"/>
+                  </a:lnTo>
+                  <a:lnTo>
+                    <a:pt x="2940129" y="662094"/>
+                  </a:lnTo>
+                  <a:lnTo>
+                    <a:pt x="2940129" y="604792"/>
+                  </a:lnTo>
+                  <a:lnTo>
+                    <a:pt x="3029224" y="604792"/>
+                  </a:lnTo>
+                  <a:lnTo>
+                    <a:pt x="3029224" y="545887"/>
+                  </a:lnTo>
+                  <a:lnTo>
+                    <a:pt x="3118319" y="545887"/>
+                  </a:lnTo>
+                  <a:lnTo>
+                    <a:pt x="3118319" y="486888"/>
+                  </a:lnTo>
+                  <a:lnTo>
+                    <a:pt x="3741982" y="486888"/>
+                  </a:lnTo>
+                  <a:lnTo>
+                    <a:pt x="3741982" y="427372"/>
+                  </a:lnTo>
+                  <a:lnTo>
+                    <a:pt x="3920172" y="427372"/>
+                  </a:lnTo>
+                  <a:lnTo>
+                    <a:pt x="3920172" y="365284"/>
+                  </a:lnTo>
+                  <a:lnTo>
+                    <a:pt x="4187457" y="365284"/>
+                  </a:lnTo>
+                  <a:lnTo>
+                    <a:pt x="4187457" y="304041"/>
+                  </a:lnTo>
+                  <a:lnTo>
+                    <a:pt x="5345689" y="304041"/>
+                  </a:lnTo>
+                  <a:lnTo>
+                    <a:pt x="5345689" y="242719"/>
+                  </a:lnTo>
+                  <a:lnTo>
+                    <a:pt x="5612974" y="242719"/>
+                  </a:lnTo>
+                  <a:lnTo>
+                    <a:pt x="5612974" y="182298"/>
+                  </a:lnTo>
+                  <a:lnTo>
+                    <a:pt x="5702069" y="182298"/>
+                  </a:lnTo>
+                  <a:lnTo>
+                    <a:pt x="5702069" y="122543"/>
+                  </a:lnTo>
+                  <a:lnTo>
+                    <a:pt x="5880258" y="122543"/>
+                  </a:lnTo>
+                  <a:lnTo>
+                    <a:pt x="5880258" y="60963"/>
+                  </a:lnTo>
+                  <a:lnTo>
+                    <a:pt x="6949396" y="60963"/>
                   </a:lnTo>
                   <a:lnTo>
                     <a:pt x="6949396" y="0"/>
@@ -3105,119 +3105,119 @@
           <p:spPr>
             <a:xfrm>
               <a:off x="1320344" y="2861938"/>
-              <a:ext cx="6949396" cy="2561966"/>
+              <a:ext cx="6949396" cy="2561564"/>
             </a:xfrm>
             <a:custGeom>
               <a:avLst/>
               <a:pathLst>
-                <a:path w="6949396" h="2561966">
+                <a:path w="6949396" h="2561564">
                   <a:moveTo>
-                    <a:pt x="0" y="2561966"/>
+                    <a:pt x="0" y="2561564"/>
                   </a:moveTo>
                   <a:lnTo>
-                    <a:pt x="89094" y="2561966"/>
-                  </a:lnTo>
-                  <a:lnTo>
-                    <a:pt x="89094" y="2411693"/>
-                  </a:lnTo>
-                  <a:lnTo>
-                    <a:pt x="178189" y="2411693"/>
-                  </a:lnTo>
-                  <a:lnTo>
-                    <a:pt x="178189" y="2265712"/>
-                  </a:lnTo>
-                  <a:lnTo>
-                    <a:pt x="534568" y="2265712"/>
-                  </a:lnTo>
-                  <a:lnTo>
-                    <a:pt x="534568" y="1989810"/>
-                  </a:lnTo>
-                  <a:lnTo>
-                    <a:pt x="1514612" y="1989810"/>
-                  </a:lnTo>
-                  <a:lnTo>
-                    <a:pt x="1514612" y="1857912"/>
-                  </a:lnTo>
-                  <a:lnTo>
-                    <a:pt x="1781896" y="1857912"/>
-                  </a:lnTo>
-                  <a:lnTo>
-                    <a:pt x="1781896" y="1730006"/>
-                  </a:lnTo>
-                  <a:lnTo>
-                    <a:pt x="1960086" y="1730006"/>
-                  </a:lnTo>
-                  <a:lnTo>
-                    <a:pt x="1960086" y="1597912"/>
-                  </a:lnTo>
-                  <a:lnTo>
-                    <a:pt x="2227370" y="1597912"/>
-                  </a:lnTo>
-                  <a:lnTo>
-                    <a:pt x="2227370" y="1469642"/>
-                  </a:lnTo>
-                  <a:lnTo>
-                    <a:pt x="2940129" y="1469642"/>
-                  </a:lnTo>
-                  <a:lnTo>
-                    <a:pt x="2940129" y="1332708"/>
-                  </a:lnTo>
-                  <a:lnTo>
-                    <a:pt x="3029224" y="1332708"/>
-                  </a:lnTo>
-                  <a:lnTo>
-                    <a:pt x="3029224" y="1193494"/>
-                  </a:lnTo>
-                  <a:lnTo>
-                    <a:pt x="3118319" y="1193494"/>
-                  </a:lnTo>
-                  <a:lnTo>
-                    <a:pt x="3118319" y="1056839"/>
-                  </a:lnTo>
-                  <a:lnTo>
-                    <a:pt x="3741982" y="1056839"/>
-                  </a:lnTo>
-                  <a:lnTo>
-                    <a:pt x="3741982" y="920954"/>
-                  </a:lnTo>
-                  <a:lnTo>
-                    <a:pt x="3920172" y="920954"/>
-                  </a:lnTo>
-                  <a:lnTo>
-                    <a:pt x="3920172" y="781389"/>
-                  </a:lnTo>
-                  <a:lnTo>
-                    <a:pt x="4187457" y="781389"/>
-                  </a:lnTo>
-                  <a:lnTo>
-                    <a:pt x="4187457" y="645752"/>
-                  </a:lnTo>
-                  <a:lnTo>
-                    <a:pt x="5345689" y="645752"/>
-                  </a:lnTo>
-                  <a:lnTo>
-                    <a:pt x="5345689" y="511996"/>
-                  </a:lnTo>
-                  <a:lnTo>
-                    <a:pt x="5612974" y="511996"/>
-                  </a:lnTo>
-                  <a:lnTo>
-                    <a:pt x="5612974" y="382005"/>
-                  </a:lnTo>
-                  <a:lnTo>
-                    <a:pt x="5702069" y="382005"/>
-                  </a:lnTo>
-                  <a:lnTo>
-                    <a:pt x="5702069" y="255129"/>
-                  </a:lnTo>
-                  <a:lnTo>
-                    <a:pt x="5880258" y="255129"/>
-                  </a:lnTo>
-                  <a:lnTo>
-                    <a:pt x="5880258" y="126116"/>
-                  </a:lnTo>
-                  <a:lnTo>
-                    <a:pt x="6949396" y="126116"/>
+                    <a:pt x="89094" y="2561564"/>
+                  </a:lnTo>
+                  <a:lnTo>
+                    <a:pt x="89094" y="2411349"/>
+                  </a:lnTo>
+                  <a:lnTo>
+                    <a:pt x="178189" y="2411349"/>
+                  </a:lnTo>
+                  <a:lnTo>
+                    <a:pt x="178189" y="2265557"/>
+                  </a:lnTo>
+                  <a:lnTo>
+                    <a:pt x="534568" y="2265557"/>
+                  </a:lnTo>
+                  <a:lnTo>
+                    <a:pt x="534568" y="1990557"/>
+                  </a:lnTo>
+                  <a:lnTo>
+                    <a:pt x="1514612" y="1990557"/>
+                  </a:lnTo>
+                  <a:lnTo>
+                    <a:pt x="1514612" y="1859275"/>
+                  </a:lnTo>
+                  <a:lnTo>
+                    <a:pt x="1781896" y="1859275"/>
+                  </a:lnTo>
+                  <a:lnTo>
+                    <a:pt x="1781896" y="1732050"/>
+                  </a:lnTo>
+                  <a:lnTo>
+                    <a:pt x="1960086" y="1732050"/>
+                  </a:lnTo>
+                  <a:lnTo>
+                    <a:pt x="1960086" y="1600016"/>
+                  </a:lnTo>
+                  <a:lnTo>
+                    <a:pt x="2227370" y="1600016"/>
+                  </a:lnTo>
+                  <a:lnTo>
+                    <a:pt x="2227370" y="1471894"/>
+                  </a:lnTo>
+                  <a:lnTo>
+                    <a:pt x="2940129" y="1471894"/>
+                  </a:lnTo>
+                  <a:lnTo>
+                    <a:pt x="2940129" y="1334222"/>
+                  </a:lnTo>
+                  <a:lnTo>
+                    <a:pt x="3029224" y="1334222"/>
+                  </a:lnTo>
+                  <a:lnTo>
+                    <a:pt x="3029224" y="1195043"/>
+                  </a:lnTo>
+                  <a:lnTo>
+                    <a:pt x="3118319" y="1195043"/>
+                  </a:lnTo>
+                  <a:lnTo>
+                    <a:pt x="3118319" y="1057875"/>
+                  </a:lnTo>
+                  <a:lnTo>
+                    <a:pt x="3741982" y="1057875"/>
+                  </a:lnTo>
+                  <a:lnTo>
+                    <a:pt x="3741982" y="921652"/>
+                  </a:lnTo>
+                  <a:lnTo>
+                    <a:pt x="3920172" y="921652"/>
+                  </a:lnTo>
+                  <a:lnTo>
+                    <a:pt x="3920172" y="781734"/>
+                  </a:lnTo>
+                  <a:lnTo>
+                    <a:pt x="4187457" y="781734"/>
+                  </a:lnTo>
+                  <a:lnTo>
+                    <a:pt x="4187457" y="645829"/>
+                  </a:lnTo>
+                  <a:lnTo>
+                    <a:pt x="5345689" y="645829"/>
+                  </a:lnTo>
+                  <a:lnTo>
+                    <a:pt x="5345689" y="511776"/>
+                  </a:lnTo>
+                  <a:lnTo>
+                    <a:pt x="5612974" y="511776"/>
+                  </a:lnTo>
+                  <a:lnTo>
+                    <a:pt x="5612974" y="381617"/>
+                  </a:lnTo>
+                  <a:lnTo>
+                    <a:pt x="5702069" y="381617"/>
+                  </a:lnTo>
+                  <a:lnTo>
+                    <a:pt x="5702069" y="254721"/>
+                  </a:lnTo>
+                  <a:lnTo>
+                    <a:pt x="5880258" y="254721"/>
+                  </a:lnTo>
+                  <a:lnTo>
+                    <a:pt x="5880258" y="125808"/>
+                  </a:lnTo>
+                  <a:lnTo>
+                    <a:pt x="6949396" y="125808"/>
                   </a:lnTo>
                   <a:lnTo>
                     <a:pt x="6949396" y="0"/>
@@ -3295,7 +3295,7 @@
           </p:nvSpPr>
           <p:spPr>
             <a:xfrm>
-              <a:off x="692708" y="4816218"/>
+              <a:off x="692708" y="4834133"/>
               <a:ext cx="217535" cy="80101"/>
             </a:xfrm>
             <a:prstGeom prst="rect">
@@ -3341,7 +3341,7 @@
           </p:nvSpPr>
           <p:spPr>
             <a:xfrm>
-              <a:off x="692708" y="4092065"/>
+              <a:off x="692708" y="4127895"/>
               <a:ext cx="217535" cy="80101"/>
             </a:xfrm>
             <a:prstGeom prst="rect">
@@ -3387,7 +3387,7 @@
           </p:nvSpPr>
           <p:spPr>
             <a:xfrm>
-              <a:off x="692708" y="3367912"/>
+              <a:off x="692708" y="3421658"/>
               <a:ext cx="217535" cy="80101"/>
             </a:xfrm>
             <a:prstGeom prst="rect">
@@ -3433,7 +3433,7 @@
           </p:nvSpPr>
           <p:spPr>
             <a:xfrm>
-              <a:off x="692708" y="2643759"/>
+              <a:off x="692708" y="2715420"/>
               <a:ext cx="217535" cy="80101"/>
             </a:xfrm>
             <a:prstGeom prst="rect">
@@ -3914,7 +3914,7 @@
                   <a:latin typeface="Helvetica"/>
                   <a:cs typeface="Helvetica"/>
                 </a:rPr>
-                <a:t>Discrep &gt;= +25 vs &lt;+25: subHR = 2.91 (95% CI 0.73-11.56), p = 0.129</a:t>
+                <a:t>Discrep &gt;= +25 vs &lt;+25: subHR = 3.02 (95% CI 0.74-12.27), p = 0.123</a:t>
               </a:r>
             </a:p>
           </p:txBody>
